--- a/presentation/Pik-drishti_AI_Seva_2026.pptx
+++ b/presentation/Pik-drishti_AI_Seva_2026.pptx
@@ -1504,8 +1504,9 @@
                   <a:srgbClr val="F28C28"/>
                 </a:solidFill>
                 <a:latin typeface="Nirmala UI"/>
-              </a:rPr>
-              <a:t>[deployment link]</a:t>
+                <a:hlinkClick r:id="rId4"/>
+              </a:rPr>
+              <a:t>pik-drishti.onrender.com</a:t>
             </a:r>
           </a:p>
         </p:txBody>
@@ -6495,7 +6496,26 @@
                 <a:ea typeface="Nirmala UI" pitchFamily="34" charset="-122"/>
                 <a:cs typeface="Nirmala UI" pitchFamily="34" charset="-120"/>
               </a:rPr>
-              <a:t>District collectors; IIIT Nagpur</a:t>
+              <a:t>District collectors</a:t>
+            </a:r>
+          </a:p>
+          <a:p>
+            <a:pPr marL="118872" indent="-118872">
+              <a:spcAft>
+                <a:spcPts val="300"/>
+              </a:spcAft>
+              <a:buChar char="•"/>
+            </a:pPr>
+            <a:r>
+              <a:rPr lang="en-US" sz="900" i="0" dirty="0" b="0">
+                <a:solidFill>
+                  <a:srgbClr val="1F2937"/>
+                </a:solidFill>
+                <a:latin typeface="Nirmala UI" pitchFamily="34" charset="0"/>
+                <a:ea typeface="Nirmala UI" pitchFamily="34" charset="-122"/>
+                <a:cs typeface="Nirmala UI" pitchFamily="34" charset="-120"/>
+              </a:rPr>
+              <a:t>IIIT Nagpur</a:t>
             </a:r>
           </a:p>
         </p:txBody>
@@ -6573,8 +6593,9 @@
                   <a:srgbClr val="F28C28"/>
                 </a:solidFill>
                 <a:latin typeface="Nirmala UI"/>
-              </a:rPr>
-              <a:t>[deployment link]</a:t>
+                <a:hlinkClick r:id="rId3"/>
+              </a:rPr>
+              <a:t>pik-drishti.onrender.com</a:t>
             </a:r>
           </a:p>
         </p:txBody>
@@ -9236,8 +9257,9 @@
                 <a:latin typeface="Nirmala UI" pitchFamily="34" charset="0"/>
                 <a:ea typeface="Nirmala UI" pitchFamily="34" charset="-122"/>
                 <a:cs typeface="Nirmala UI" pitchFamily="34" charset="-120"/>
-              </a:rPr>
-              <a:t>[deployment link]</a:t>
+                <a:hlinkClick r:id="rId3"/>
+              </a:rPr>
+              <a:t>pik-drishti.onrender.com</a:t>
             </a:r>
           </a:p>
         </p:txBody>

--- a/presentation/Pik-drishti_AI_Seva_2026.pptx
+++ b/presentation/Pik-drishti_AI_Seva_2026.pptx
@@ -9451,10 +9451,10 @@
         <a:srgbClr val="70AD47"/>
       </a:accent6>
       <a:hlink>
-        <a:srgbClr val="0563C1"/>
+        <a:srgbClr val="F28C28"/>
       </a:hlink>
       <a:folHlink>
-        <a:srgbClr val="954F72"/>
+        <a:srgbClr val="F28C28"/>
       </a:folHlink>
     </a:clrScheme>
     <a:fontScheme name="Office">

--- a/presentation/Pik-drishti_AI_Seva_2026.pptx
+++ b/presentation/Pik-drishti_AI_Seva_2026.pptx
@@ -1126,7 +1126,7 @@
               <a:buNone/>
             </a:pPr>
             <a:r>
-              <a:rPr lang="en-US" sz="1000" b="0" kern="0" spc="200" dirty="0" i="0">
+              <a:rPr lang="en-US" sz="1100" b="0" kern="0" spc="200" dirty="0" i="0">
                 <a:solidFill>
                   <a:srgbClr val="F28C28"/>
                 </a:solidFill>
@@ -1165,7 +1165,7 @@
               <a:buNone/>
             </a:pPr>
             <a:r>
-              <a:rPr lang="en-US" sz="3600" b="1" dirty="0" i="0">
+              <a:rPr lang="en-US" sz="3700" b="1" dirty="0" i="0">
                 <a:solidFill>
                   <a:srgbClr val="FFFFFF"/>
                 </a:solidFill>
@@ -1204,7 +1204,7 @@
               <a:buNone/>
             </a:pPr>
             <a:r>
-              <a:rPr lang="en-US" sz="1300" i="0" dirty="0" b="0">
+              <a:rPr lang="en-US" sz="1400" i="0" dirty="0" b="0">
                 <a:solidFill>
                   <a:srgbClr val="C9D2EC"/>
                 </a:solidFill>
@@ -1277,7 +1277,7 @@
               <a:buNone/>
             </a:pPr>
             <a:r>
-              <a:rPr lang="en-US" sz="1300" b="1" dirty="0" i="0">
+              <a:rPr lang="en-US" sz="1400" b="1" dirty="0" i="0">
                 <a:solidFill>
                   <a:srgbClr val="F28C28"/>
                 </a:solidFill>
@@ -1319,91 +1319,20 @@
               </a:spcAft>
             </a:pPr>
             <a:r>
-              <a:rPr sz="1050" b="1">
+              <a:rPr sz="1150" b="1">
                 <a:solidFill>
                   <a:srgbClr val="F28C28"/>
                 </a:solidFill>
                 <a:latin typeface="Nirmala UI"/>
               </a:rPr>
               <a:t>Sub-theme: Farmer income protection, market access and digital crop-loss assessment</a:t>
-            </a:r>
-          </a:p>
-        </p:txBody>
-      </p:sp>
-      <p:sp>
-        <p:nvSpPr>
-          <p:cNvPr id="21" name="TextBox 20"/>
-          <p:cNvSpPr txBox="1"/>
-          <p:nvPr/>
-        </p:nvSpPr>
-        <p:spPr>
-          <a:xfrm>
-            <a:off x="457200" y="3703320"/>
-            <a:ext cx="5120640" cy="685800"/>
-          </a:xfrm>
-          <a:prstGeom prst="rect">
-            <a:avLst/>
-          </a:prstGeom>
-          <a:noFill/>
-        </p:spPr>
-        <p:txBody>
-          <a:bodyPr wrap="square" anchor="t" lIns="0" rIns="0" tIns="0" bIns="0">
-            <a:spAutoFit/>
-          </a:bodyPr>
-          <a:lstStyle/>
-          <a:p>
-            <a:pPr>
-              <a:spcAft>
-                <a:spcPts val="500"/>
-              </a:spcAft>
-            </a:pPr>
-            <a:r>
-              <a:rPr sz="1050" b="1">
-                <a:solidFill>
-                  <a:srgbClr val="FFFFFF"/>
-                </a:solidFill>
-                <a:latin typeface="Nirmala UI"/>
-              </a:rPr>
-              <a:t>Sujal Chondekar  ·  Kshitij Mehrotra</a:t>
-            </a:r>
-          </a:p>
-          <a:p>
-            <a:pPr>
-              <a:spcAft>
-                <a:spcPts val="500"/>
-              </a:spcAft>
-            </a:pPr>
-            <a:r>
-              <a:rPr sz="1050" b="0">
-                <a:solidFill>
-                  <a:srgbClr val="C9D2EC"/>
-                </a:solidFill>
-                <a:latin typeface="Nirmala UI"/>
-              </a:rPr>
-              <a:t>Mentor: Dr. Swati Hira, Assistant Professor, CSE</a:t>
-            </a:r>
-          </a:p>
-          <a:p>
-            <a:pPr>
-              <a:spcAft>
-                <a:spcPts val="500"/>
-              </a:spcAft>
-            </a:pPr>
-            <a:r>
-              <a:rPr sz="1050" b="0">
-                <a:solidFill>
-                  <a:srgbClr val="C9D2EC"/>
-                </a:solidFill>
-                <a:latin typeface="Nirmala UI"/>
-              </a:rPr>
-              <a:t>Indian Institute of Information Technology, Nagpur</a:t>
             </a:r>
           </a:p>
         </p:txBody>
       </p:sp>
       <p:pic>
         <p:nvPicPr>
-          <p:cNvPr id="22" name="Picture 21" descr="image.png"/>
+          <p:cNvPr id="21" name="Picture 20" descr="image.png"/>
           <p:cNvPicPr>
             <a:picLocks noChangeAspect="1"/>
           </p:cNvPicPr>
@@ -1432,7 +1361,7 @@
       </p:pic>
       <p:sp>
         <p:nvSpPr>
-          <p:cNvPr id="23" name="TextBox 22"/>
+          <p:cNvPr id="22" name="TextBox 21"/>
           <p:cNvSpPr txBox="1"/>
           <p:nvPr/>
         </p:nvSpPr>
@@ -1458,7 +1387,7 @@
               </a:spcAft>
             </a:pPr>
             <a:r>
-              <a:rPr sz="1000" b="0">
+              <a:rPr sz="1100" b="0">
                 <a:solidFill>
                   <a:srgbClr val="FFFFFF"/>
                 </a:solidFill>
@@ -1474,7 +1403,7 @@
               </a:spcAft>
             </a:pPr>
             <a:r>
-              <a:rPr sz="1000" b="0">
+              <a:rPr sz="1100" b="0">
                 <a:solidFill>
                   <a:srgbClr val="FFFFFF"/>
                 </a:solidFill>
@@ -1490,7 +1419,7 @@
               </a:spcAft>
             </a:pPr>
             <a:r>
-              <a:rPr sz="1000" b="1">
+              <a:rPr sz="1100" b="1">
                 <a:solidFill>
                   <a:srgbClr val="FFFFFF"/>
                 </a:solidFill>
@@ -1499,7 +1428,7 @@
               <a:t>Live demo: </a:t>
             </a:r>
             <a:r>
-              <a:rPr sz="1000" b="1">
+              <a:rPr sz="1100" b="1">
                 <a:solidFill>
                   <a:srgbClr val="F28C28"/>
                 </a:solidFill>
@@ -1833,7 +1762,7 @@
               <a:buNone/>
             </a:pPr>
             <a:r>
-              <a:rPr lang="en-US" sz="1000" i="0" dirty="0" b="0">
+              <a:rPr lang="en-US" sz="1100" i="0" dirty="0" b="0">
                 <a:solidFill>
                   <a:srgbClr val="1F2937"/>
                 </a:solidFill>
@@ -1844,7 +1773,7 @@
               <a:t>After floods or unseasonal rain, every damaged farm is inspected </a:t>
             </a:r>
             <a:r>
-              <a:rPr lang="en-US" sz="1000" i="0" dirty="0" b="1">
+              <a:rPr lang="en-US" sz="1100" i="0" dirty="0" b="1">
                 <a:solidFill>
                   <a:srgbClr val="1F2937"/>
                 </a:solidFill>
@@ -1855,7 +1784,7 @@
               <a:t>by hand</a:t>
             </a:r>
             <a:r>
-              <a:rPr lang="en-US" sz="1000" i="0" dirty="0" b="0">
+              <a:rPr lang="en-US" sz="1100" i="0" dirty="0" b="0">
                 <a:solidFill>
                   <a:srgbClr val="1F2937"/>
                 </a:solidFill>
@@ -1866,7 +1795,7 @@
               <a:t> (panchanama) before relief or insurance is paid. With lakhs of farms hit at once this takes </a:t>
             </a:r>
             <a:r>
-              <a:rPr lang="en-US" sz="1000" i="0" dirty="0" b="1">
+              <a:rPr lang="en-US" sz="1100" i="0" dirty="0" b="1">
                 <a:solidFill>
                   <a:srgbClr val="1F2937"/>
                 </a:solidFill>
@@ -1877,7 +1806,7 @@
               <a:t>weeks</a:t>
             </a:r>
             <a:r>
-              <a:rPr lang="en-US" sz="1000" i="0" dirty="0" b="0">
+              <a:rPr lang="en-US" sz="1100" i="0" dirty="0" b="0">
                 <a:solidFill>
                   <a:srgbClr val="1F2937"/>
                 </a:solidFill>
@@ -1992,7 +1921,7 @@
               <a:buNone/>
             </a:pPr>
             <a:r>
-              <a:rPr lang="en-US" sz="1000" i="0" dirty="0" b="0">
+              <a:rPr lang="en-US" sz="1100" i="0" dirty="0" b="0">
                 <a:solidFill>
                   <a:srgbClr val="1F2937"/>
                 </a:solidFill>
@@ -2003,7 +1932,7 @@
               <a:t>Small and marginal farmers across Maharashtra. In 2025, </a:t>
             </a:r>
             <a:r>
-              <a:rPr lang="en-US" sz="1000" i="0" dirty="0" b="1">
+              <a:rPr lang="en-US" sz="1100" i="0" dirty="0" b="1">
                 <a:solidFill>
                   <a:srgbClr val="1F2937"/>
                 </a:solidFill>
@@ -2014,7 +1943,7 @@
               <a:t>29 of 36 districts</a:t>
             </a:r>
             <a:r>
-              <a:rPr lang="en-US" sz="1000" i="0" dirty="0" b="0">
+              <a:rPr lang="en-US" sz="1100" i="0" dirty="0" b="0">
                 <a:solidFill>
                   <a:srgbClr val="1F2937"/>
                 </a:solidFill>
@@ -2025,7 +1954,7 @@
               <a:t> and </a:t>
             </a:r>
             <a:r>
-              <a:rPr lang="en-US" sz="1000" i="0" dirty="0" b="1">
+              <a:rPr lang="en-US" sz="1100" i="0" dirty="0" b="1">
                 <a:solidFill>
                   <a:srgbClr val="1F2937"/>
                 </a:solidFill>
@@ -2036,7 +1965,7 @@
               <a:t>253 talukas</a:t>
             </a:r>
             <a:r>
-              <a:rPr lang="en-US" sz="1000" i="0" dirty="0" b="0">
+              <a:rPr lang="en-US" sz="1100" i="0" dirty="0" b="0">
                 <a:solidFill>
                   <a:srgbClr val="1F2937"/>
                 </a:solidFill>
@@ -2047,7 +1976,7 @@
               <a:t> were hit, Marathwada the worst. </a:t>
             </a:r>
             <a:r>
-              <a:rPr lang="en-US" sz="1000" i="0" dirty="0" b="0">
+              <a:rPr lang="en-US" sz="1100" i="0" dirty="0" b="0">
                 <a:solidFill>
                   <a:srgbClr val="1F2937"/>
                 </a:solidFill>
@@ -2162,7 +2091,7 @@
               <a:buChar char="•"/>
             </a:pPr>
             <a:r>
-              <a:rPr lang="en-US" sz="950" i="0" dirty="0" b="1">
+              <a:rPr lang="en-US" sz="1050" i="0" dirty="0" b="1">
                 <a:solidFill>
                   <a:srgbClr val="1F2937"/>
                 </a:solidFill>
@@ -2173,7 +2102,7 @@
               <a:t>60–68 lakh ha</a:t>
             </a:r>
             <a:r>
-              <a:rPr lang="en-US" sz="950" i="0" dirty="0" b="0">
+              <a:rPr lang="en-US" sz="1050" i="0" dirty="0" b="0">
                 <a:solidFill>
                   <a:srgbClr val="1F2937"/>
                 </a:solidFill>
@@ -2184,7 +2113,7 @@
               <a:t> crops damaged, Jun–Sep 2025; </a:t>
             </a:r>
             <a:r>
-              <a:rPr lang="en-US" sz="950" i="0" dirty="0" b="1">
+              <a:rPr lang="en-US" sz="1050" i="0" dirty="0" b="1">
                 <a:solidFill>
                   <a:srgbClr val="1F2937"/>
                 </a:solidFill>
@@ -2195,7 +2124,7 @@
               <a:t>₹31,628 cr</a:t>
             </a:r>
             <a:r>
-              <a:rPr lang="en-US" sz="950" i="0" dirty="0" b="0">
+              <a:rPr lang="en-US" sz="1050" i="0" dirty="0" b="0">
                 <a:solidFill>
                   <a:srgbClr val="1F2937"/>
                 </a:solidFill>
@@ -2215,7 +2144,7 @@
               <a:buChar char="•"/>
             </a:pPr>
             <a:r>
-              <a:rPr lang="en-US" sz="950" i="0" dirty="0" b="0">
+              <a:rPr lang="en-US" sz="1050" i="0" dirty="0" b="0">
                 <a:solidFill>
                   <a:srgbClr val="1F2937"/>
                 </a:solidFill>
@@ -2226,7 +2155,7 @@
               <a:t>Banana storms, 2026: survey ordered </a:t>
             </a:r>
             <a:r>
-              <a:rPr lang="en-US" sz="950" i="0" dirty="0" b="1">
+              <a:rPr lang="en-US" sz="1050" i="0" dirty="0" b="1">
                 <a:solidFill>
                   <a:srgbClr val="1F2937"/>
                 </a:solidFill>
@@ -2237,7 +2166,7 @@
               <a:t>~3 weeks</a:t>
             </a:r>
             <a:r>
-              <a:rPr lang="en-US" sz="950" i="0" dirty="0" b="0">
+              <a:rPr lang="en-US" sz="1050" i="0" dirty="0" b="0">
                 <a:solidFill>
                   <a:srgbClr val="1F2937"/>
                 </a:solidFill>
@@ -2256,7 +2185,7 @@
               <a:buChar char="•"/>
             </a:pPr>
             <a:r>
-              <a:rPr lang="en-US" sz="950" i="0" dirty="0" b="0">
+              <a:rPr lang="en-US" sz="1050" i="0" dirty="0" b="0">
                 <a:solidFill>
                   <a:srgbClr val="1F2937"/>
                 </a:solidFill>
@@ -2267,7 +2196,7 @@
               <a:t>The State itself proposed </a:t>
             </a:r>
             <a:r>
-              <a:rPr lang="en-US" sz="950" i="0" dirty="0" b="1">
+              <a:rPr lang="en-US" sz="1050" i="0" dirty="0" b="1">
                 <a:solidFill>
                   <a:srgbClr val="1F2937"/>
                 </a:solidFill>
@@ -2278,7 +2207,7 @@
               <a:t>using satellites</a:t>
             </a:r>
             <a:r>
-              <a:rPr lang="en-US" sz="950" i="0" dirty="0" b="0">
+              <a:rPr lang="en-US" sz="1050" i="0" dirty="0" b="0">
                 <a:solidFill>
                   <a:srgbClr val="1F2937"/>
                 </a:solidFill>
@@ -2392,7 +2321,7 @@
               <a:buChar char="•"/>
             </a:pPr>
             <a:r>
-              <a:rPr lang="en-US" sz="950" i="0" dirty="0" b="1">
+              <a:rPr lang="en-US" sz="1050" i="0" dirty="0" b="1">
                 <a:solidFill>
                   <a:srgbClr val="1F2937"/>
                 </a:solidFill>
@@ -2403,7 +2332,7 @@
               <a:t>Panchanama</a:t>
             </a:r>
             <a:r>
-              <a:rPr lang="en-US" sz="950" i="0" dirty="0" b="0">
+              <a:rPr lang="en-US" sz="1050" i="0" dirty="0" b="0">
                 <a:solidFill>
                   <a:srgbClr val="1F2937"/>
                 </a:solidFill>
@@ -2423,7 +2352,7 @@
               <a:buChar char="•"/>
             </a:pPr>
             <a:r>
-              <a:rPr lang="en-US" sz="950" i="0" dirty="0" b="1">
+              <a:rPr lang="en-US" sz="1050" i="0" dirty="0" b="1">
                 <a:solidFill>
                   <a:srgbClr val="1F2937"/>
                 </a:solidFill>
@@ -2434,7 +2363,7 @@
               <a:t>Drone surveys</a:t>
             </a:r>
             <a:r>
-              <a:rPr lang="en-US" sz="950" i="0" dirty="0" b="0">
+              <a:rPr lang="en-US" sz="1050" i="0" dirty="0" b="0">
                 <a:solidFill>
                   <a:srgbClr val="1F2937"/>
                 </a:solidFill>
@@ -2453,7 +2382,7 @@
               <a:buChar char="•"/>
             </a:pPr>
             <a:r>
-              <a:rPr lang="en-US" sz="950" i="0" dirty="0" b="1">
+              <a:rPr lang="en-US" sz="1050" i="0" dirty="0" b="1">
                 <a:solidFill>
                   <a:srgbClr val="1F2937"/>
                 </a:solidFill>
@@ -2464,7 +2393,7 @@
               <a:t>YES-TECH / CROPIC</a:t>
             </a:r>
             <a:r>
-              <a:rPr lang="en-US" sz="950" i="0" dirty="0" b="0">
+              <a:rPr lang="en-US" sz="1050" i="0" dirty="0" b="0">
                 <a:solidFill>
                   <a:srgbClr val="1F2937"/>
                 </a:solidFill>
@@ -2539,7 +2468,7 @@
               <a:buNone/>
             </a:pPr>
             <a:r>
-              <a:rPr lang="en-US" sz="2400" b="1" dirty="0" i="0">
+              <a:rPr lang="en-US" sz="2500" b="1" dirty="0" i="0">
                 <a:solidFill>
                   <a:srgbClr val="F28C28"/>
                 </a:solidFill>
@@ -2581,7 +2510,7 @@
               <a:buNone/>
             </a:pPr>
             <a:r>
-              <a:rPr lang="en-US" sz="1050" i="0" dirty="0" b="0">
+              <a:rPr lang="en-US" sz="1150" i="0" dirty="0" b="0">
                 <a:solidFill>
                   <a:srgbClr val="FFFFFF"/>
                 </a:solidFill>
@@ -2662,7 +2591,7 @@
               <a:buNone/>
             </a:pPr>
             <a:r>
-              <a:rPr lang="en-US" sz="1000" i="0" dirty="0" b="0">
+              <a:rPr lang="en-US" sz="1100" i="0" dirty="0" b="0">
                 <a:solidFill>
                   <a:srgbClr val="C9D2EC"/>
                 </a:solidFill>
@@ -2998,7 +2927,7 @@
               <a:buNone/>
             </a:pPr>
             <a:r>
-              <a:rPr lang="en-US" sz="950" i="0" dirty="0" b="1">
+              <a:rPr lang="en-US" sz="1050" i="0" dirty="0" b="1">
                 <a:solidFill>
                   <a:srgbClr val="1F2937"/>
                 </a:solidFill>
@@ -3009,7 +2938,7 @@
               <a:t>Pik-drishti AI</a:t>
             </a:r>
             <a:r>
-              <a:rPr lang="en-US" sz="950" i="0" dirty="0" b="0">
+              <a:rPr lang="en-US" sz="1050" i="0" dirty="0" b="0">
                 <a:solidFill>
                   <a:srgbClr val="1F2937"/>
                 </a:solidFill>
@@ -3017,10 +2946,10 @@
                 <a:ea typeface="Nirmala UI" pitchFamily="34" charset="-122"/>
                 <a:cs typeface="Nirmala UI" pitchFamily="34" charset="-120"/>
               </a:rPr>
-              <a:t> turns free satellite data into village-level evidence: which talukas meet the </a:t>
-            </a:r>
-            <a:r>
-              <a:rPr lang="en-US" sz="950" i="0" dirty="0" b="1">
+              <a:t> turns free satellite data into village evidence for the </a:t>
+            </a:r>
+            <a:r>
+              <a:rPr lang="en-US" sz="1050" i="0" dirty="0" b="1">
                 <a:solidFill>
                   <a:srgbClr val="1F2937"/>
                 </a:solidFill>
@@ -3031,7 +2960,7 @@
               <a:t>drought manual's triggers</a:t>
             </a:r>
             <a:r>
-              <a:rPr lang="en-US" sz="950" i="0" dirty="0" b="0">
+              <a:rPr lang="en-US" sz="1050" i="0" dirty="0" b="0">
                 <a:solidFill>
                   <a:srgbClr val="1F2937"/>
                 </a:solidFill>
@@ -3039,10 +2968,10 @@
                 <a:ea typeface="Nirmala UI" pitchFamily="34" charset="-122"/>
                 <a:cs typeface="Nirmala UI" pitchFamily="34" charset="-120"/>
               </a:rPr>
-              <a:t>, and which villages lost crops to floods, ranked for </a:t>
-            </a:r>
-            <a:r>
-              <a:rPr lang="en-US" sz="950" i="0" dirty="0" b="1">
+              <a:t> and for crop-loss </a:t>
+            </a:r>
+            <a:r>
+              <a:rPr lang="en-US" sz="1050" i="0" dirty="0" b="1">
                 <a:solidFill>
                   <a:srgbClr val="1F2937"/>
                 </a:solidFill>
@@ -3053,7 +2982,7 @@
               <a:t>panchanama</a:t>
             </a:r>
             <a:r>
-              <a:rPr lang="en-US" sz="950" i="0" dirty="0" b="0">
+              <a:rPr lang="en-US" sz="1050" i="0" dirty="0" b="0">
                 <a:solidFill>
                   <a:srgbClr val="1F2937"/>
                 </a:solidFill>
@@ -3278,7 +3207,7 @@
               <a:buNone/>
             </a:pPr>
             <a:r>
-              <a:rPr lang="en-US" sz="850" i="0" dirty="0" b="0">
+              <a:rPr lang="en-US" sz="950" i="0" dirty="0" b="0">
                 <a:solidFill>
                   <a:srgbClr val="1F2937"/>
                 </a:solidFill>
@@ -3503,7 +3432,7 @@
               <a:buNone/>
             </a:pPr>
             <a:r>
-              <a:rPr lang="en-US" sz="850" i="0" dirty="0" b="0">
+              <a:rPr lang="en-US" sz="950" i="0" dirty="0" b="0">
                 <a:solidFill>
                   <a:srgbClr val="1F2937"/>
                 </a:solidFill>
@@ -3728,7 +3657,7 @@
               <a:buNone/>
             </a:pPr>
             <a:r>
-              <a:rPr lang="en-US" sz="850" i="0" dirty="0" b="0">
+              <a:rPr lang="en-US" sz="950" i="0" dirty="0" b="0">
                 <a:solidFill>
                   <a:srgbClr val="1F2937"/>
                 </a:solidFill>
@@ -4036,7 +3965,7 @@
                         <a:buNone/>
                       </a:pPr>
                       <a:r>
-                        <a:rPr lang="en-US" sz="900" b="1" dirty="0" i="0">
+                        <a:rPr lang="en-US" sz="1000" b="1" dirty="0" i="0">
                           <a:solidFill>
                             <a:srgbClr val="1B2A5C"/>
                           </a:solidFill>
@@ -4104,7 +4033,7 @@
                         <a:buNone/>
                       </a:pPr>
                       <a:r>
-                        <a:rPr lang="en-US" sz="850" i="0" dirty="0" b="0">
+                        <a:rPr lang="en-US" sz="950" i="0" dirty="0" b="0">
                           <a:solidFill>
                             <a:srgbClr val="1F2937"/>
                           </a:solidFill>
@@ -4112,7 +4041,7 @@
                           <a:ea typeface="Nirmala UI" pitchFamily="34" charset="-122"/>
                           <a:cs typeface="Nirmala UI" pitchFamily="34" charset="-120"/>
                         </a:rPr>
-                        <a:t>Staff visits to every village; drones extra</a:t>
+                        <a:t>Staff visit every village</a:t>
                       </a:r>
                       <a:endParaRPr lang="en-US" sz="1000" dirty="0">
                         <a:latin typeface="Nirmala UI" charset="0"/>
@@ -4172,7 +4101,7 @@
                         <a:buNone/>
                       </a:pPr>
                       <a:r>
-                        <a:rPr lang="en-US" sz="850" i="0" dirty="0" b="1">
+                        <a:rPr lang="en-US" sz="950" i="0" dirty="0" b="1">
                           <a:solidFill>
                             <a:srgbClr val="1F2937"/>
                           </a:solidFill>
@@ -4180,7 +4109,7 @@
                           <a:ea typeface="Nirmala UI" pitchFamily="34" charset="-122"/>
                           <a:cs typeface="Nirmala UI" pitchFamily="34" charset="-120"/>
                         </a:rPr>
-                        <a:t>Free open satellite data; one small server</a:t>
+                        <a:t>Free satellite data; small server</a:t>
                       </a:r>
                       <a:endParaRPr lang="en-US" sz="1000" dirty="0">
                         <a:latin typeface="Nirmala UI" charset="0"/>
@@ -4247,7 +4176,7 @@
                         <a:buNone/>
                       </a:pPr>
                       <a:r>
-                        <a:rPr lang="en-US" sz="900" b="1" dirty="0" i="0">
+                        <a:rPr lang="en-US" sz="1000" b="1" dirty="0" i="0">
                           <a:solidFill>
                             <a:srgbClr val="1B2A5C"/>
                           </a:solidFill>
@@ -4315,7 +4244,7 @@
                         <a:buNone/>
                       </a:pPr>
                       <a:r>
-                        <a:rPr lang="en-US" sz="850" i="0" dirty="0" b="0">
+                        <a:rPr lang="en-US" sz="950" i="0" dirty="0" b="0">
                           <a:solidFill>
                             <a:srgbClr val="1F2937"/>
                           </a:solidFill>
@@ -4323,7 +4252,7 @@
                           <a:ea typeface="Nirmala UI" pitchFamily="34" charset="-122"/>
                           <a:cs typeface="Nirmala UI" pitchFamily="34" charset="-120"/>
                         </a:rPr>
-                        <a:t>Weeks to 2 months per district</a:t>
+                        <a:t>Weeks to 2 months a district</a:t>
                       </a:r>
                       <a:endParaRPr lang="en-US" sz="1000" dirty="0">
                         <a:latin typeface="Nirmala UI" charset="0"/>
@@ -4383,7 +4312,7 @@
                         <a:buNone/>
                       </a:pPr>
                       <a:r>
-                        <a:rPr lang="en-US" sz="850" i="0" dirty="0" b="1">
+                        <a:rPr lang="en-US" sz="950" i="0" dirty="0" b="1">
                           <a:solidFill>
                             <a:srgbClr val="1F2937"/>
                           </a:solidFill>
@@ -4391,7 +4320,7 @@
                           <a:ea typeface="Nirmala UI" pitchFamily="34" charset="-122"/>
                           <a:cs typeface="Nirmala UI" pitchFamily="34" charset="-120"/>
                         </a:rPr>
-                        <a:t>All talukas ~1 min; a taluka's villages ~2 min</a:t>
+                        <a:t>Talukas ~1 min; villages ~2 min</a:t>
                       </a:r>
                       <a:endParaRPr lang="en-US" sz="1000" dirty="0">
                         <a:latin typeface="Nirmala UI" charset="0"/>
@@ -4458,7 +4387,7 @@
                         <a:buNone/>
                       </a:pPr>
                       <a:r>
-                        <a:rPr lang="en-US" sz="900" b="1" dirty="0" i="0">
+                        <a:rPr lang="en-US" sz="1000" b="1" dirty="0" i="0">
                           <a:solidFill>
                             <a:srgbClr val="1B2A5C"/>
                           </a:solidFill>
@@ -4526,7 +4455,7 @@
                         <a:buNone/>
                       </a:pPr>
                       <a:r>
-                        <a:rPr lang="en-US" sz="850" i="0" dirty="0" b="0">
+                        <a:rPr lang="en-US" sz="950" i="0" dirty="0" b="0">
                           <a:solidFill>
                             <a:srgbClr val="1F2937"/>
                           </a:solidFill>
@@ -4534,7 +4463,7 @@
                           <a:ea typeface="Nirmala UI" pitchFamily="34" charset="-122"/>
                           <a:cs typeface="Nirmala UI" pitchFamily="34" charset="-120"/>
                         </a:rPr>
-                        <a:t>Limited by field staff; farms get missed</a:t>
+                        <a:t>Field staff miss farms</a:t>
                       </a:r>
                       <a:endParaRPr lang="en-US" sz="1000" dirty="0">
                         <a:latin typeface="Nirmala UI" charset="0"/>
@@ -4594,7 +4523,7 @@
                         <a:buNone/>
                       </a:pPr>
                       <a:r>
-                        <a:rPr lang="en-US" sz="850" i="0" dirty="0" b="1">
+                        <a:rPr lang="en-US" sz="950" i="0" dirty="0" b="1">
                           <a:solidFill>
                             <a:srgbClr val="1F2937"/>
                           </a:solidFill>
@@ -4602,7 +4531,7 @@
                           <a:ea typeface="Nirmala UI" pitchFamily="34" charset="-122"/>
                           <a:cs typeface="Nirmala UI" pitchFamily="34" charset="-120"/>
                         </a:rPr>
-                        <a:t>All 48,926 villages, every season</a:t>
+                        <a:t>All 48,926 villages, each season</a:t>
                       </a:r>
                       <a:endParaRPr lang="en-US" sz="1000" dirty="0">
                         <a:latin typeface="Nirmala UI" charset="0"/>
@@ -4669,7 +4598,7 @@
                         <a:buNone/>
                       </a:pPr>
                       <a:r>
-                        <a:rPr lang="en-US" sz="900" b="1" dirty="0" i="0">
+                        <a:rPr lang="en-US" sz="1000" b="1" dirty="0" i="0">
                           <a:solidFill>
                             <a:srgbClr val="1B2A5C"/>
                           </a:solidFill>
@@ -4737,7 +4666,7 @@
                         <a:buNone/>
                       </a:pPr>
                       <a:r>
-                        <a:rPr lang="en-US" sz="850" i="0" dirty="0" b="0">
+                        <a:rPr lang="en-US" sz="950" i="0" dirty="0" b="0">
                           <a:solidFill>
                             <a:srgbClr val="1F2937"/>
                           </a:solidFill>
@@ -4745,7 +4674,7 @@
                           <a:ea typeface="Nirmala UI" pitchFamily="34" charset="-122"/>
                           <a:cs typeface="Nirmala UI" pitchFamily="34" charset="-120"/>
                         </a:rPr>
-                        <a:t>Paper forms, manual compiling</a:t>
+                        <a:t>Paper forms, manual totals</a:t>
                       </a:r>
                       <a:endParaRPr lang="en-US" sz="1000" dirty="0">
                         <a:latin typeface="Nirmala UI" charset="0"/>
@@ -4805,7 +4734,7 @@
                         <a:buNone/>
                       </a:pPr>
                       <a:r>
-                        <a:rPr lang="en-US" sz="850" i="0" dirty="0" b="1">
+                        <a:rPr lang="en-US" sz="950" i="0" dirty="0" b="1">
                           <a:solidFill>
                             <a:srgbClr val="1F2937"/>
                           </a:solidFill>
@@ -4813,7 +4742,7 @@
                           <a:ea typeface="Nirmala UI" pitchFamily="34" charset="-122"/>
                           <a:cs typeface="Nirmala UI" pitchFamily="34" charset="-120"/>
                         </a:rPr>
-                        <a:t>Web map, ready PDF and KML; no GIS skills</a:t>
+                        <a:t>Web map, PDF, KML; no GIS</a:t>
                       </a:r>
                       <a:endParaRPr lang="en-US" sz="1000" dirty="0">
                         <a:latin typeface="Nirmala UI" charset="0"/>
@@ -4941,7 +4870,7 @@
               <a:buNone/>
             </a:pPr>
             <a:r>
-              <a:rPr lang="en-US" sz="950" i="0" dirty="0" b="0">
+              <a:rPr lang="en-US" sz="1050" i="0" dirty="0" b="0">
                 <a:solidFill>
                   <a:srgbClr val="1F2937"/>
                 </a:solidFill>
@@ -4952,7 +4881,7 @@
               <a:t>Follows the Government of India drought manual step by step and shows the evidence for every village. Its Trigger-1 already matches the official 2026 list in </a:t>
             </a:r>
             <a:r>
-              <a:rPr lang="en-US" sz="950" i="0" dirty="0" b="1">
+              <a:rPr lang="en-US" sz="1050" i="0" dirty="0" b="1">
                 <a:solidFill>
                   <a:srgbClr val="1F2937"/>
                 </a:solidFill>
@@ -4963,7 +4892,7 @@
               <a:t>Jalgaon (15/15)</a:t>
             </a:r>
             <a:r>
-              <a:rPr lang="en-US" sz="950" i="0" dirty="0" b="0">
+              <a:rPr lang="en-US" sz="1050" i="0" dirty="0" b="0">
                 <a:solidFill>
                   <a:srgbClr val="1F2937"/>
                 </a:solidFill>
@@ -4974,7 +4903,7 @@
               <a:t> and </a:t>
             </a:r>
             <a:r>
-              <a:rPr lang="en-US" sz="950" i="0" dirty="0" b="1">
+              <a:rPr lang="en-US" sz="1050" i="0" dirty="0" b="1">
                 <a:solidFill>
                   <a:srgbClr val="1F2937"/>
                 </a:solidFill>
@@ -4985,7 +4914,7 @@
               <a:t>Buldhana (13/13)</a:t>
             </a:r>
             <a:r>
-              <a:rPr lang="en-US" sz="950" i="0" dirty="0" b="0">
+              <a:rPr lang="en-US" sz="1050" i="0" dirty="0" b="0">
                 <a:solidFill>
                   <a:srgbClr val="1F2937"/>
                 </a:solidFill>
@@ -5052,7 +4981,7 @@
           <a:p>
             <a:pPr algn="l"/>
             <a:r>
-              <a:rPr sz="650" b="0">
+              <a:rPr sz="750" b="0">
                 <a:solidFill>
                   <a:srgbClr val="6B7280"/>
                 </a:solidFill>
@@ -5555,7 +5484,7 @@
               <a:buNone/>
             </a:pPr>
             <a:r>
-              <a:rPr lang="en-US" sz="1000" b="1" dirty="0" i="0">
+              <a:rPr lang="en-US" sz="1100" b="1" dirty="0" i="0">
                 <a:solidFill>
                   <a:srgbClr val="F28C28"/>
                 </a:solidFill>
@@ -5812,7 +5741,7 @@
               <a:buChar char="•"/>
             </a:pPr>
             <a:r>
-              <a:rPr lang="en-US" sz="900" i="0" dirty="0" b="1">
+              <a:rPr lang="en-US" sz="1000" i="0" dirty="0" b="1">
                 <a:solidFill>
                   <a:srgbClr val="1F2937"/>
                 </a:solidFill>
@@ -5823,7 +5752,7 @@
               <a:t>Google Earth Engine</a:t>
             </a:r>
             <a:r>
-              <a:rPr lang="en-US" sz="900" i="0" dirty="0" b="0">
+              <a:rPr lang="en-US" sz="1000" i="0" dirty="0" b="0">
                 <a:solidFill>
                   <a:srgbClr val="1F2937"/>
                 </a:solidFill>
@@ -5831,7 +5760,7 @@
                 <a:ea typeface="Nirmala UI" pitchFamily="34" charset="-122"/>
                 <a:cs typeface="Nirmala UI" pitchFamily="34" charset="-120"/>
               </a:rPr>
-              <a:t> for all satellite processing</a:t>
+              <a:t> + web map app</a:t>
             </a:r>
             <a:endParaRPr lang="en-US" sz="1000" dirty="0"/>
           </a:p>
@@ -5843,7 +5772,7 @@
               <a:buChar char="•"/>
             </a:pPr>
             <a:r>
-              <a:rPr lang="en-US" sz="900" i="0" dirty="0" b="1">
+              <a:rPr lang="en-US" sz="1000" i="0" dirty="0" b="1">
                 <a:solidFill>
                   <a:srgbClr val="1F2937"/>
                 </a:solidFill>
@@ -5851,10 +5780,10 @@
                 <a:ea typeface="Nirmala UI" pitchFamily="34" charset="-122"/>
                 <a:cs typeface="Nirmala UI" pitchFamily="34" charset="-120"/>
               </a:rPr>
-              <a:t>Python + React</a:t>
-            </a:r>
-            <a:r>
-              <a:rPr lang="en-US" sz="900" i="0" dirty="0" b="0">
+              <a:t>Data: </a:t>
+            </a:r>
+            <a:r>
+              <a:rPr lang="en-US" sz="1000" i="0" dirty="0" b="0">
                 <a:solidFill>
                   <a:srgbClr val="1F2937"/>
                 </a:solidFill>
@@ -5862,7 +5791,7 @@
                 <a:ea typeface="Nirmala UI" pitchFamily="34" charset="-122"/>
                 <a:cs typeface="Nirmala UI" pitchFamily="34" charset="-120"/>
               </a:rPr>
-              <a:t> web app with maps</a:t>
+              <a:t>CHIRPS, MODIS, Sentinel-1/2, WorldCover</a:t>
             </a:r>
           </a:p>
           <a:p>
@@ -5873,7 +5802,7 @@
               <a:buChar char="•"/>
             </a:pPr>
             <a:r>
-              <a:rPr lang="en-US" sz="900" i="0" dirty="0" b="1">
+              <a:rPr lang="en-US" sz="1000" i="0" dirty="0" b="1">
                 <a:solidFill>
                   <a:srgbClr val="1F2937"/>
                 </a:solidFill>
@@ -5881,10 +5810,10 @@
                 <a:ea typeface="Nirmala UI" pitchFamily="34" charset="-122"/>
                 <a:cs typeface="Nirmala UI" pitchFamily="34" charset="-120"/>
               </a:rPr>
-              <a:t>Data: </a:t>
-            </a:r>
-            <a:r>
-              <a:rPr lang="en-US" sz="900" i="0" dirty="0" b="0">
+              <a:t>Next: drone survey</a:t>
+            </a:r>
+            <a:r>
+              <a:rPr lang="en-US" sz="1000" i="0" dirty="0" b="0">
                 <a:solidFill>
                   <a:srgbClr val="1F2937"/>
                 </a:solidFill>
@@ -5892,37 +5821,7 @@
                 <a:ea typeface="Nirmala UI" pitchFamily="34" charset="-122"/>
                 <a:cs typeface="Nirmala UI" pitchFamily="34" charset="-120"/>
               </a:rPr>
-              <a:t>CHIRPS, MODIS, Sentinel-1, Sentinel-2, ESA WorldCover</a:t>
-            </a:r>
-          </a:p>
-          <a:p>
-            <a:pPr marL="118872" indent="-118872">
-              <a:spcAft>
-                <a:spcPts val="300"/>
-              </a:spcAft>
-              <a:buChar char="•"/>
-            </a:pPr>
-            <a:r>
-              <a:rPr lang="en-US" sz="900" i="0" dirty="0" b="1">
-                <a:solidFill>
-                  <a:srgbClr val="1F2937"/>
-                </a:solidFill>
-                <a:latin typeface="Nirmala UI" pitchFamily="34" charset="0"/>
-                <a:ea typeface="Nirmala UI" pitchFamily="34" charset="-122"/>
-                <a:cs typeface="Nirmala UI" pitchFamily="34" charset="-120"/>
-              </a:rPr>
-              <a:t>Next: drone survey</a:t>
-            </a:r>
-            <a:r>
-              <a:rPr lang="en-US" sz="900" i="0" dirty="0" b="0">
-                <a:solidFill>
-                  <a:srgbClr val="1F2937"/>
-                </a:solidFill>
-                <a:latin typeface="Nirmala UI" pitchFamily="34" charset="0"/>
-                <a:ea typeface="Nirmala UI" pitchFamily="34" charset="-122"/>
-                <a:cs typeface="Nirmala UI" pitchFamily="34" charset="-120"/>
-              </a:rPr>
-              <a:t> of flagged villages, reusing our Van-drishti drone pipeline</a:t>
+              <a:t> of flagged villages</a:t>
             </a:r>
           </a:p>
         </p:txBody>
@@ -6028,7 +5927,7 @@
               <a:buChar char="•"/>
             </a:pPr>
             <a:r>
-              <a:rPr lang="en-US" sz="900" i="0" dirty="0" b="1">
+              <a:rPr lang="en-US" sz="1000" i="0" dirty="0" b="1">
                 <a:solidFill>
                   <a:srgbClr val="1F2937"/>
                 </a:solidFill>
@@ -6039,7 +5938,7 @@
               <a:t>Data: ₹0</a:t>
             </a:r>
             <a:r>
-              <a:rPr lang="en-US" sz="900" i="0" dirty="0" b="0">
+              <a:rPr lang="en-US" sz="1000" i="0" dirty="0" b="0">
                 <a:solidFill>
                   <a:srgbClr val="1F2937"/>
                 </a:solidFill>
@@ -6059,7 +5958,7 @@
               <a:buChar char="•"/>
             </a:pPr>
             <a:r>
-              <a:rPr lang="en-US" sz="900" i="0" dirty="0" b="1">
+              <a:rPr lang="en-US" sz="1000" i="0" dirty="0" b="1">
                 <a:solidFill>
                   <a:srgbClr val="1F2937"/>
                 </a:solidFill>
@@ -6070,7 +5969,7 @@
               <a:t>Server: ~₹5,000 / month</a:t>
             </a:r>
             <a:r>
-              <a:rPr lang="en-US" sz="900" i="0" dirty="0" b="0">
+              <a:rPr lang="en-US" sz="1000" i="0" dirty="0" b="0">
                 <a:solidFill>
                   <a:srgbClr val="1F2937"/>
                 </a:solidFill>
@@ -6089,7 +5988,7 @@
               <a:buChar char="•"/>
             </a:pPr>
             <a:r>
-              <a:rPr lang="en-US" sz="900" i="0" dirty="0" b="1">
+              <a:rPr lang="en-US" sz="1000" i="0" dirty="0" b="1">
                 <a:solidFill>
                   <a:srgbClr val="1F2937"/>
                 </a:solidFill>
@@ -6100,7 +5999,7 @@
               <a:t>About ₹1-2 per village</a:t>
             </a:r>
             <a:r>
-              <a:rPr lang="en-US" sz="900" i="0" dirty="0" b="0">
+              <a:rPr lang="en-US" sz="1000" i="0" dirty="0" b="0">
                 <a:solidFill>
                   <a:srgbClr val="1F2937"/>
                 </a:solidFill>
@@ -6119,7 +6018,7 @@
               <a:buChar char="•"/>
             </a:pPr>
             <a:r>
-              <a:rPr lang="en-US" sz="900" i="0" dirty="0" b="1">
+              <a:rPr lang="en-US" sz="1000" i="0" dirty="0" b="1">
                 <a:solidFill>
                   <a:srgbClr val="1F2937"/>
                 </a:solidFill>
@@ -6130,7 +6029,7 @@
               <a:t>District pilot: under ₹1 lakh</a:t>
             </a:r>
             <a:r>
-              <a:rPr lang="en-US" sz="900" i="0" dirty="0" b="0">
+              <a:rPr lang="en-US" sz="1000" i="0" dirty="0" b="0">
                 <a:solidFill>
                   <a:srgbClr val="1F2937"/>
                 </a:solidFill>
@@ -6244,7 +6143,7 @@
               <a:buChar char="•"/>
             </a:pPr>
             <a:r>
-              <a:rPr lang="en-US" sz="900" i="0" dirty="0" b="1">
+              <a:rPr lang="en-US" sz="1000" i="0" dirty="0" b="1">
                 <a:solidFill>
                   <a:srgbClr val="1F2937"/>
                 </a:solidFill>
@@ -6255,7 +6154,7 @@
               <a:t>3 months: </a:t>
             </a:r>
             <a:r>
-              <a:rPr lang="en-US" sz="900" i="0" dirty="0" b="0">
+              <a:rPr lang="en-US" sz="1000" i="0" dirty="0" b="0">
                 <a:solidFill>
                   <a:srgbClr val="1F2937"/>
                 </a:solidFill>
@@ -6263,7 +6162,7 @@
                 <a:ea typeface="Nirmala UI" pitchFamily="34" charset="-122"/>
                 <a:cs typeface="Nirmala UI" pitchFamily="34" charset="-120"/>
               </a:rPr>
-              <a:t>pilot in one district on the kharif 2026 drought; compare with panchanamas</a:t>
+              <a:t>district pilot on the 2026 drought vs panchanamas</a:t>
             </a:r>
             <a:endParaRPr lang="en-US" sz="1000" dirty="0"/>
           </a:p>
@@ -6275,7 +6174,7 @@
               <a:buChar char="•"/>
             </a:pPr>
             <a:r>
-              <a:rPr lang="en-US" sz="900" i="0" dirty="0" b="1">
+              <a:rPr lang="en-US" sz="1000" i="0" dirty="0" b="1">
                 <a:solidFill>
                   <a:srgbClr val="1F2937"/>
                 </a:solidFill>
@@ -6286,7 +6185,7 @@
               <a:t>6 months: </a:t>
             </a:r>
             <a:r>
-              <a:rPr lang="en-US" sz="900" i="0" dirty="0" b="0">
+              <a:rPr lang="en-US" sz="1000" i="0" dirty="0" b="0">
                 <a:solidFill>
                   <a:srgbClr val="1F2937"/>
                 </a:solidFill>
@@ -6294,7 +6193,7 @@
                 <a:ea typeface="Nirmala UI" pitchFamily="34" charset="-122"/>
                 <a:cs typeface="Nirmala UI" pitchFamily="34" charset="-120"/>
               </a:rPr>
-              <a:t>drone surveys over flagged villages for plot-level damage; Marathi interface</a:t>
+              <a:t>drone surveys of flagged villages; Marathi app</a:t>
             </a:r>
           </a:p>
           <a:p>
@@ -6305,7 +6204,7 @@
               <a:buChar char="•"/>
             </a:pPr>
             <a:r>
-              <a:rPr lang="en-US" sz="900" i="0" dirty="0" b="1">
+              <a:rPr lang="en-US" sz="1000" i="0" dirty="0" b="1">
                 <a:solidFill>
                   <a:srgbClr val="1F2937"/>
                 </a:solidFill>
@@ -6316,7 +6215,7 @@
               <a:t>12 months: </a:t>
             </a:r>
             <a:r>
-              <a:rPr lang="en-US" sz="900" i="0" dirty="0" b="0">
+              <a:rPr lang="en-US" sz="1000" i="0" dirty="0" b="0">
                 <a:solidFill>
                   <a:srgbClr val="1F2937"/>
                 </a:solidFill>
@@ -6324,7 +6223,7 @@
                 <a:ea typeface="Nirmala UI" pitchFamily="34" charset="-122"/>
                 <a:cs typeface="Nirmala UI" pitchFamily="34" charset="-120"/>
               </a:rPr>
-              <a:t>statewide, with farm boundaries from land records</a:t>
+              <a:t>statewide, with land-record farm boundaries</a:t>
             </a:r>
           </a:p>
         </p:txBody>
@@ -6385,10 +6284,13 @@
           <a:lstStyle/>
           <a:p>
             <a:pPr marL="0" indent="0">
+              <a:spcAft>
+                <a:spcPts val="300"/>
+              </a:spcAft>
               <a:buNone/>
             </a:pPr>
             <a:r>
-              <a:rPr lang="en-US" sz="1200" b="1" dirty="0">
+              <a:rPr lang="en-US" sz="1200" b="1" dirty="0" i="0">
                 <a:solidFill>
                   <a:srgbClr val="1B2A5C"/>
                 </a:solidFill>
@@ -6396,7 +6298,7 @@
                 <a:ea typeface="Nirmala UI" pitchFamily="34" charset="-122"/>
                 <a:cs typeface="Nirmala UI" pitchFamily="34" charset="-120"/>
               </a:rPr>
-              <a:t>Partners</a:t>
+              <a:t>Partners to approach</a:t>
             </a:r>
             <a:endParaRPr lang="en-US" sz="1200" dirty="0"/>
           </a:p>
@@ -6430,7 +6332,7 @@
               <a:buChar char="•"/>
             </a:pPr>
             <a:r>
-              <a:rPr lang="en-US" sz="900" i="0" dirty="0" b="0">
+              <a:rPr lang="en-US" sz="1000" i="0" dirty="0" b="0">
                 <a:solidFill>
                   <a:srgbClr val="1F2937"/>
                 </a:solidFill>
@@ -6450,7 +6352,7 @@
               <a:buChar char="•"/>
             </a:pPr>
             <a:r>
-              <a:rPr lang="en-US" sz="900" i="0" dirty="0" b="0">
+              <a:rPr lang="en-US" sz="1000" i="0" dirty="0" b="0">
                 <a:solidFill>
                   <a:srgbClr val="1F2937"/>
                 </a:solidFill>
@@ -6469,7 +6371,7 @@
               <a:buChar char="•"/>
             </a:pPr>
             <a:r>
-              <a:rPr lang="en-US" sz="900" i="0" dirty="0" b="0">
+              <a:rPr lang="en-US" sz="1000" i="0" dirty="0" b="0">
                 <a:solidFill>
                   <a:srgbClr val="1F2937"/>
                 </a:solidFill>
@@ -6488,7 +6390,7 @@
               <a:buChar char="•"/>
             </a:pPr>
             <a:r>
-              <a:rPr lang="en-US" sz="900" i="0" dirty="0" b="0">
+              <a:rPr lang="en-US" sz="1000" i="0" dirty="0" b="0">
                 <a:solidFill>
                   <a:srgbClr val="1F2937"/>
                 </a:solidFill>
@@ -6507,7 +6409,7 @@
               <a:buChar char="•"/>
             </a:pPr>
             <a:r>
-              <a:rPr lang="en-US" sz="900" i="0" dirty="0" b="0">
+              <a:rPr lang="en-US" sz="1000" i="0" dirty="0" b="0">
                 <a:solidFill>
                   <a:srgbClr val="1F2937"/>
                 </a:solidFill>
@@ -6544,7 +6446,7 @@
           <a:p>
             <a:pPr algn="ctr"/>
             <a:r>
-              <a:rPr sz="1100" b="1">
+              <a:rPr sz="1200" b="1">
                 <a:solidFill>
                   <a:srgbClr val="FFFFFF"/>
                 </a:solidFill>
@@ -6579,7 +6481,7 @@
           <a:p>
             <a:pPr algn="r"/>
             <a:r>
-              <a:rPr sz="1050" b="1">
+              <a:rPr sz="1150" b="1">
                 <a:solidFill>
                   <a:srgbClr val="1B2A5C"/>
                 </a:solidFill>
@@ -6588,7 +6490,7 @@
               <a:t>Live prototype: </a:t>
             </a:r>
             <a:r>
-              <a:rPr sz="1050" b="1">
+              <a:rPr sz="1150" b="1">
                 <a:solidFill>
                   <a:srgbClr val="F28C28"/>
                 </a:solidFill>
@@ -6883,7 +6785,7 @@
               <a:buNone/>
             </a:pPr>
             <a:r>
-              <a:rPr lang="en-US" sz="2800" b="1" dirty="0" i="0">
+              <a:rPr lang="en-US" sz="2900" b="1" dirty="0" i="0">
                 <a:solidFill>
                   <a:srgbClr val="1B2A5C"/>
                 </a:solidFill>
@@ -6925,7 +6827,7 @@
               <a:buNone/>
             </a:pPr>
             <a:r>
-              <a:rPr lang="en-US" sz="1100" b="1" dirty="0" i="0">
+              <a:rPr lang="en-US" sz="1200" b="1" dirty="0" i="0">
                 <a:solidFill>
                   <a:srgbClr val="1F2937"/>
                 </a:solidFill>
@@ -6967,7 +6869,7 @@
               <a:buNone/>
             </a:pPr>
             <a:r>
-              <a:rPr lang="en-US" sz="900" i="0" dirty="0" b="0">
+              <a:rPr lang="en-US" sz="1000" i="0" dirty="0" b="0">
                 <a:solidFill>
                   <a:srgbClr val="6B7280"/>
                 </a:solidFill>
@@ -7043,7 +6945,7 @@
               <a:buNone/>
             </a:pPr>
             <a:r>
-              <a:rPr lang="en-US" sz="2600" b="1" dirty="0" i="0">
+              <a:rPr lang="en-US" sz="2700" b="1" dirty="0" i="0">
                 <a:solidFill>
                   <a:srgbClr val="1B2A5C"/>
                 </a:solidFill>
@@ -7085,7 +6987,7 @@
               <a:buNone/>
             </a:pPr>
             <a:r>
-              <a:rPr lang="en-US" sz="1100" b="1" dirty="0" i="0">
+              <a:rPr lang="en-US" sz="1200" b="1" dirty="0" i="0">
                 <a:solidFill>
                   <a:srgbClr val="1F2937"/>
                 </a:solidFill>
@@ -7127,7 +7029,7 @@
               <a:buNone/>
             </a:pPr>
             <a:r>
-              <a:rPr lang="en-US" sz="900" i="0" dirty="0" b="0">
+              <a:rPr lang="en-US" sz="1000" i="0" dirty="0" b="0">
                 <a:solidFill>
                   <a:srgbClr val="6B7280"/>
                 </a:solidFill>
@@ -7203,7 +7105,7 @@
               <a:buNone/>
             </a:pPr>
             <a:r>
-              <a:rPr lang="en-US" sz="2800" b="1" dirty="0" i="0">
+              <a:rPr lang="en-US" sz="2900" b="1" dirty="0" i="0">
                 <a:solidFill>
                   <a:srgbClr val="1B2A5C"/>
                 </a:solidFill>
@@ -7245,7 +7147,7 @@
               <a:buNone/>
             </a:pPr>
             <a:r>
-              <a:rPr lang="en-US" sz="1100" b="1" dirty="0" i="0">
+              <a:rPr lang="en-US" sz="1200" b="1" dirty="0" i="0">
                 <a:solidFill>
                   <a:srgbClr val="1F2937"/>
                 </a:solidFill>
@@ -7287,7 +7189,7 @@
               <a:buNone/>
             </a:pPr>
             <a:r>
-              <a:rPr lang="en-US" sz="900" i="0" dirty="0" b="0">
+              <a:rPr lang="en-US" sz="1000" i="0" dirty="0" b="0">
                 <a:solidFill>
                   <a:srgbClr val="6B7280"/>
                 </a:solidFill>
@@ -7402,7 +7304,7 @@
               <a:buChar char="•"/>
             </a:pPr>
             <a:r>
-              <a:rPr lang="en-US" sz="950" i="0" dirty="0" b="0">
+              <a:rPr lang="en-US" sz="1050" i="0" dirty="0" b="0">
                 <a:solidFill>
                   <a:srgbClr val="1F2937"/>
                 </a:solidFill>
@@ -7422,7 +7324,7 @@
               <a:buChar char="•"/>
             </a:pPr>
             <a:r>
-              <a:rPr lang="en-US" sz="950" i="0" dirty="0" b="0">
+              <a:rPr lang="en-US" sz="1050" i="0" dirty="0" b="0">
                 <a:solidFill>
                   <a:srgbClr val="1F2937"/>
                 </a:solidFill>
@@ -7441,7 +7343,7 @@
               <a:buChar char="•"/>
             </a:pPr>
             <a:r>
-              <a:rPr lang="en-US" sz="950" i="0" dirty="0" b="0">
+              <a:rPr lang="en-US" sz="1050" i="0" dirty="0" b="0">
                 <a:solidFill>
                   <a:srgbClr val="1F2937"/>
                 </a:solidFill>
@@ -7555,7 +7457,7 @@
               <a:buChar char="•"/>
             </a:pPr>
             <a:r>
-              <a:rPr lang="en-US" sz="950" i="0" dirty="0" b="0">
+              <a:rPr lang="en-US" sz="1050" i="0" dirty="0" b="0">
                 <a:solidFill>
                   <a:srgbClr val="1F2937"/>
                 </a:solidFill>
@@ -7575,7 +7477,7 @@
               <a:buChar char="•"/>
             </a:pPr>
             <a:r>
-              <a:rPr lang="en-US" sz="950" i="0" dirty="0" b="0">
+              <a:rPr lang="en-US" sz="1050" i="0" dirty="0" b="0">
                 <a:solidFill>
                   <a:srgbClr val="1F2937"/>
                 </a:solidFill>
@@ -7594,7 +7496,7 @@
               <a:buChar char="•"/>
             </a:pPr>
             <a:r>
-              <a:rPr lang="en-US" sz="950" i="0" dirty="0" b="0">
+              <a:rPr lang="en-US" sz="1050" i="0" dirty="0" b="0">
                 <a:solidFill>
                   <a:srgbClr val="1F2937"/>
                 </a:solidFill>
@@ -7708,7 +7610,7 @@
               <a:buChar char="•"/>
             </a:pPr>
             <a:r>
-              <a:rPr lang="en-US" sz="950" i="0" dirty="0" b="0">
+              <a:rPr lang="en-US" sz="1050" i="0" dirty="0" b="0">
                 <a:solidFill>
                   <a:srgbClr val="1F2937"/>
                 </a:solidFill>
@@ -7728,7 +7630,7 @@
               <a:buChar char="•"/>
             </a:pPr>
             <a:r>
-              <a:rPr lang="en-US" sz="950" i="0" dirty="0" b="0">
+              <a:rPr lang="en-US" sz="1050" i="0" dirty="0" b="0">
                 <a:solidFill>
                   <a:srgbClr val="1F2937"/>
                 </a:solidFill>
@@ -7747,7 +7649,7 @@
               <a:buChar char="•"/>
             </a:pPr>
             <a:r>
-              <a:rPr lang="en-US" sz="950" i="0" dirty="0" b="0">
+              <a:rPr lang="en-US" sz="1050" i="0" dirty="0" b="0">
                 <a:solidFill>
                   <a:srgbClr val="1F2937"/>
                 </a:solidFill>
@@ -7784,7 +7686,7 @@
           <a:p>
             <a:pPr algn="l"/>
             <a:r>
-              <a:rPr sz="650" b="0">
+              <a:rPr sz="750" b="0">
                 <a:solidFill>
                   <a:srgbClr val="6B7280"/>
                 </a:solidFill>
@@ -8071,7 +7973,7 @@
               <a:buNone/>
             </a:pPr>
             <a:r>
-              <a:rPr lang="en-US" sz="1100" dirty="0" i="0" b="1">
+              <a:rPr lang="en-US" sz="1200" dirty="0" i="0" b="1">
                 <a:solidFill>
                   <a:srgbClr val="FFFFFF"/>
                 </a:solidFill>
@@ -8113,7 +8015,7 @@
               <a:buNone/>
             </a:pPr>
             <a:r>
-              <a:rPr lang="en-US" sz="1050" b="1" dirty="0" i="0">
+              <a:rPr lang="en-US" sz="1150" b="1" dirty="0" i="0">
                 <a:solidFill>
                   <a:srgbClr val="FFFFFF"/>
                 </a:solidFill>
@@ -8155,7 +8057,7 @@
               <a:buNone/>
             </a:pPr>
             <a:r>
-              <a:rPr lang="en-US" sz="900" i="0" dirty="0" b="0">
+              <a:rPr lang="en-US" sz="1000" i="0" dirty="0" b="0">
                 <a:solidFill>
                   <a:srgbClr val="F28C28"/>
                 </a:solidFill>
@@ -8163,7 +8065,7 @@
                 <a:ea typeface="Nirmala UI" pitchFamily="34" charset="-122"/>
                 <a:cs typeface="Nirmala UI" pitchFamily="34" charset="-120"/>
               </a:rPr>
-              <a:t>Lead developer</a:t>
+              <a:t>Developer</a:t>
             </a:r>
             <a:endParaRPr lang="en-US" sz="900" dirty="0"/>
           </a:p>
@@ -8197,7 +8099,7 @@
               <a:buNone/>
             </a:pPr>
             <a:r>
-              <a:rPr lang="en-US" sz="800" i="0" dirty="0" b="0">
+              <a:rPr lang="en-US" sz="900" i="0" dirty="0" b="0">
                 <a:solidFill>
                   <a:srgbClr val="C9D2EC"/>
                 </a:solidFill>
@@ -8305,7 +8207,7 @@
               <a:buNone/>
             </a:pPr>
             <a:r>
-              <a:rPr lang="en-US" sz="1100" dirty="0" i="0" b="1">
+              <a:rPr lang="en-US" sz="1200" dirty="0" i="0" b="1">
                 <a:solidFill>
                   <a:srgbClr val="FFFFFF"/>
                 </a:solidFill>
@@ -8313,7 +8215,7 @@
                 <a:ea typeface="Nirmala UI" pitchFamily="34" charset="-122"/>
                 <a:cs typeface="Nirmala UI" pitchFamily="34" charset="-120"/>
               </a:rPr>
-              <a:t>KM</a:t>
+              <a:t>SH</a:t>
             </a:r>
             <a:endParaRPr lang="en-US" sz="700" dirty="0"/>
           </a:p>
@@ -8347,7 +8249,7 @@
               <a:buNone/>
             </a:pPr>
             <a:r>
-              <a:rPr lang="en-US" sz="1050" b="1" dirty="0" i="0">
+              <a:rPr lang="en-US" sz="1150" b="1" dirty="0" i="0">
                 <a:solidFill>
                   <a:srgbClr val="FFFFFF"/>
                 </a:solidFill>
@@ -8355,7 +8257,7 @@
                 <a:ea typeface="Nirmala UI" pitchFamily="34" charset="-122"/>
                 <a:cs typeface="Nirmala UI" pitchFamily="34" charset="-120"/>
               </a:rPr>
-              <a:t>Kshitij Mehrotra</a:t>
+              <a:t>Dr. Swati Hira</a:t>
             </a:r>
             <a:endParaRPr lang="en-US" sz="1050" dirty="0"/>
           </a:p>
@@ -8389,7 +8291,7 @@
               <a:buNone/>
             </a:pPr>
             <a:r>
-              <a:rPr lang="en-US" sz="900" i="0" dirty="0" b="0">
+              <a:rPr lang="en-US" sz="1000" i="0" dirty="0" b="0">
                 <a:solidFill>
                   <a:srgbClr val="F28C28"/>
                 </a:solidFill>
@@ -8397,7 +8299,7 @@
                 <a:ea typeface="Nirmala UI" pitchFamily="34" charset="-122"/>
                 <a:cs typeface="Nirmala UI" pitchFamily="34" charset="-120"/>
               </a:rPr>
-              <a:t>Developer</a:t>
+              <a:t>Faculty mentor</a:t>
             </a:r>
             <a:endParaRPr lang="en-US" sz="900" dirty="0"/>
           </a:p>
@@ -8431,7 +8333,7 @@
               <a:buNone/>
             </a:pPr>
             <a:r>
-              <a:rPr lang="en-US" sz="800" i="0" dirty="0" b="0">
+              <a:rPr lang="en-US" sz="900" i="0" dirty="0" b="0">
                 <a:solidFill>
                   <a:srgbClr val="C9D2EC"/>
                 </a:solidFill>
@@ -8439,7 +8341,7 @@
                 <a:ea typeface="Nirmala UI" pitchFamily="34" charset="-122"/>
                 <a:cs typeface="Nirmala UI" pitchFamily="34" charset="-120"/>
               </a:rPr>
-              <a:t>B.Tech CSE, IIIT Nagpur · data and validation</a:t>
+              <a:t>Assistant Professor, CSE, IIIT Nagpur</a:t>
             </a:r>
             <a:endParaRPr lang="en-US" sz="850" dirty="0"/>
           </a:p>
@@ -8447,122 +8349,14 @@
       </p:sp>
       <p:sp>
         <p:nvSpPr>
-          <p:cNvPr id="18" name="Shape 16"/>
-          <p:cNvSpPr/>
-          <p:nvPr/>
-        </p:nvSpPr>
-        <p:spPr>
-          <a:xfrm>
-            <a:off x="457200" y="2468880"/>
-            <a:ext cx="2103120" cy="1143000"/>
-          </a:xfrm>
-          <a:prstGeom prst="roundRect">
-            <a:avLst>
-              <a:gd name="adj" fmla="val 6400"/>
-            </a:avLst>
-          </a:prstGeom>
-          <a:solidFill>
-            <a:srgbClr val="253870"/>
-          </a:solidFill>
-          <a:ln w="12700">
-            <a:solidFill>
-              <a:srgbClr val="253870"/>
-            </a:solidFill>
-            <a:prstDash val="solid"/>
-          </a:ln>
-        </p:spPr>
-        <p:txBody>
-          <a:bodyPr/>
-          <a:lstStyle/>
-          <a:p>
-            <a:endParaRPr lang="en-IN"/>
-          </a:p>
-        </p:txBody>
-      </p:sp>
-      <p:sp>
-        <p:nvSpPr>
-          <p:cNvPr id="19" name="Shape 17"/>
-          <p:cNvSpPr/>
-          <p:nvPr/>
-        </p:nvSpPr>
-        <p:spPr>
-          <a:xfrm>
-            <a:off x="594360" y="2651760"/>
-            <a:ext cx="502920" cy="502920"/>
-          </a:xfrm>
-          <a:prstGeom prst="ellipse">
-            <a:avLst/>
-          </a:prstGeom>
-          <a:solidFill>
-            <a:srgbClr val="3A4C85"/>
-          </a:solidFill>
-          <a:ln w="12700">
-            <a:solidFill>
-              <a:srgbClr val="F28C28"/>
-            </a:solidFill>
-            <a:prstDash val="solid"/>
-          </a:ln>
-        </p:spPr>
-        <p:txBody>
-          <a:bodyPr/>
-          <a:lstStyle/>
-          <a:p>
-            <a:endParaRPr lang="en-IN"/>
-          </a:p>
-        </p:txBody>
-      </p:sp>
-      <p:sp>
-        <p:nvSpPr>
-          <p:cNvPr id="20" name="Text 18"/>
-          <p:cNvSpPr txBox="1"/>
-          <p:nvPr/>
-        </p:nvSpPr>
-        <p:spPr>
-          <a:xfrm>
-            <a:off x="594360" y="2651760"/>
-            <a:ext cx="502920" cy="502920"/>
-          </a:xfrm>
-          <a:prstGeom prst="rect">
-            <a:avLst/>
-          </a:prstGeom>
-          <a:noFill/>
-          <a:ln/>
-        </p:spPr>
-        <p:txBody>
-          <a:bodyPr wrap="square" lIns="0" tIns="0" rIns="0" bIns="0" rtlCol="0" anchor="ctr"/>
-          <a:lstStyle/>
-          <a:p>
-            <a:pPr marL="0" indent="0" algn="ctr">
-              <a:spcAft>
-                <a:spcPts val="300"/>
-              </a:spcAft>
-              <a:buNone/>
-            </a:pPr>
-            <a:r>
-              <a:rPr lang="en-US" sz="1100" dirty="0" i="0" b="1">
-                <a:solidFill>
-                  <a:srgbClr val="FFFFFF"/>
-                </a:solidFill>
-                <a:latin typeface="Nirmala UI" pitchFamily="34" charset="0"/>
-                <a:ea typeface="Nirmala UI" pitchFamily="34" charset="-122"/>
-                <a:cs typeface="Nirmala UI" pitchFamily="34" charset="-120"/>
-              </a:rPr>
-              <a:t>SH</a:t>
-            </a:r>
-            <a:endParaRPr lang="en-US" sz="700" dirty="0"/>
-          </a:p>
-        </p:txBody>
-      </p:sp>
-      <p:sp>
-        <p:nvSpPr>
-          <p:cNvPr id="21" name="Text 19"/>
-          <p:cNvSpPr txBox="1"/>
-          <p:nvPr/>
-        </p:nvSpPr>
-        <p:spPr>
-          <a:xfrm>
-            <a:off x="1207008" y="2633472"/>
-            <a:ext cx="1280160" cy="256032"/>
+          <p:cNvPr id="30" name="Text 28"/>
+          <p:cNvSpPr txBox="1"/>
+          <p:nvPr/>
+        </p:nvSpPr>
+        <p:spPr>
+          <a:xfrm>
+            <a:off x="457200" y="2560320"/>
+            <a:ext cx="4389120" cy="274320"/>
           </a:xfrm>
           <a:prstGeom prst="rect">
             <a:avLst/>
@@ -8581,133 +8375,7 @@
               <a:buNone/>
             </a:pPr>
             <a:r>
-              <a:rPr lang="en-US" sz="1050" b="1" dirty="0" i="0">
-                <a:solidFill>
-                  <a:srgbClr val="FFFFFF"/>
-                </a:solidFill>
-                <a:latin typeface="Nirmala UI" pitchFamily="34" charset="0"/>
-                <a:ea typeface="Nirmala UI" pitchFamily="34" charset="-122"/>
-                <a:cs typeface="Nirmala UI" pitchFamily="34" charset="-120"/>
-              </a:rPr>
-              <a:t>Dr. Swati Hira</a:t>
-            </a:r>
-            <a:endParaRPr lang="en-US" sz="1050" dirty="0"/>
-          </a:p>
-        </p:txBody>
-      </p:sp>
-      <p:sp>
-        <p:nvSpPr>
-          <p:cNvPr id="22" name="Text 20"/>
-          <p:cNvSpPr txBox="1"/>
-          <p:nvPr/>
-        </p:nvSpPr>
-        <p:spPr>
-          <a:xfrm>
-            <a:off x="1207008" y="2889504"/>
-            <a:ext cx="1280160" cy="201168"/>
-          </a:xfrm>
-          <a:prstGeom prst="rect">
-            <a:avLst/>
-          </a:prstGeom>
-          <a:noFill/>
-          <a:ln/>
-        </p:spPr>
-        <p:txBody>
-          <a:bodyPr wrap="square" lIns="0" tIns="0" rIns="0" bIns="0" rtlCol="0" anchor="t"/>
-          <a:lstStyle/>
-          <a:p>
-            <a:pPr marL="0" indent="0">
-              <a:spcAft>
-                <a:spcPts val="300"/>
-              </a:spcAft>
-              <a:buNone/>
-            </a:pPr>
-            <a:r>
-              <a:rPr lang="en-US" sz="900" i="0" dirty="0" b="0">
-                <a:solidFill>
-                  <a:srgbClr val="F28C28"/>
-                </a:solidFill>
-                <a:latin typeface="Nirmala UI" pitchFamily="34" charset="0"/>
-                <a:ea typeface="Nirmala UI" pitchFamily="34" charset="-122"/>
-                <a:cs typeface="Nirmala UI" pitchFamily="34" charset="-120"/>
-              </a:rPr>
-              <a:t>Faculty mentor</a:t>
-            </a:r>
-            <a:endParaRPr lang="en-US" sz="900" dirty="0"/>
-          </a:p>
-        </p:txBody>
-      </p:sp>
-      <p:sp>
-        <p:nvSpPr>
-          <p:cNvPr id="23" name="Text 21"/>
-          <p:cNvSpPr txBox="1"/>
-          <p:nvPr/>
-        </p:nvSpPr>
-        <p:spPr>
-          <a:xfrm>
-            <a:off x="1207008" y="3108960"/>
-            <a:ext cx="1280160" cy="411480"/>
-          </a:xfrm>
-          <a:prstGeom prst="rect">
-            <a:avLst/>
-          </a:prstGeom>
-          <a:noFill/>
-          <a:ln/>
-        </p:spPr>
-        <p:txBody>
-          <a:bodyPr wrap="square" lIns="0" tIns="0" rIns="0" bIns="0" rtlCol="0" anchor="t"/>
-          <a:lstStyle/>
-          <a:p>
-            <a:pPr marL="0" indent="0">
-              <a:spcAft>
-                <a:spcPts val="300"/>
-              </a:spcAft>
-              <a:buNone/>
-            </a:pPr>
-            <a:r>
-              <a:rPr lang="en-US" sz="800" i="0" dirty="0" b="0">
-                <a:solidFill>
-                  <a:srgbClr val="C9D2EC"/>
-                </a:solidFill>
-                <a:latin typeface="Nirmala UI" pitchFamily="34" charset="0"/>
-                <a:ea typeface="Nirmala UI" pitchFamily="34" charset="-122"/>
-                <a:cs typeface="Nirmala UI" pitchFamily="34" charset="-120"/>
-              </a:rPr>
-              <a:t>Assistant Professor, CSE, IIIT Nagpur</a:t>
-            </a:r>
-            <a:endParaRPr lang="en-US" sz="850" dirty="0"/>
-          </a:p>
-        </p:txBody>
-      </p:sp>
-      <p:sp>
-        <p:nvSpPr>
-          <p:cNvPr id="30" name="Text 28"/>
-          <p:cNvSpPr txBox="1"/>
-          <p:nvPr/>
-        </p:nvSpPr>
-        <p:spPr>
-          <a:xfrm>
-            <a:off x="457200" y="3840480"/>
-            <a:ext cx="4389120" cy="274320"/>
-          </a:xfrm>
-          <a:prstGeom prst="rect">
-            <a:avLst/>
-          </a:prstGeom>
-          <a:noFill/>
-          <a:ln/>
-        </p:spPr>
-        <p:txBody>
-          <a:bodyPr wrap="square" lIns="0" tIns="0" rIns="0" bIns="0" rtlCol="0" anchor="t"/>
-          <a:lstStyle/>
-          <a:p>
-            <a:pPr marL="0" indent="0">
-              <a:spcAft>
-                <a:spcPts val="300"/>
-              </a:spcAft>
-              <a:buNone/>
-            </a:pPr>
-            <a:r>
-              <a:rPr lang="en-US" sz="950" i="0" dirty="0" b="0">
+              <a:rPr lang="en-US" sz="1050" i="0" dirty="0" b="0">
                 <a:solidFill>
                   <a:srgbClr val="C9D2EC"/>
                 </a:solidFill>
@@ -9177,7 +8845,7 @@
               <a:buNone/>
             </a:pPr>
             <a:r>
-              <a:rPr lang="en-US" sz="900" i="0" dirty="0" b="0">
+              <a:rPr lang="en-US" sz="1000" i="0" dirty="0" b="0">
                 <a:solidFill>
                   <a:srgbClr val="1F2937"/>
                 </a:solidFill>
@@ -9199,8 +8867,8 @@
         </p:nvSpPr>
         <p:spPr>
           <a:xfrm>
-            <a:off x="457200" y="4224528"/>
-            <a:ext cx="4389120" cy="457200"/>
+            <a:off x="457200" y="2971800"/>
+            <a:ext cx="4389120" cy="548640"/>
           </a:xfrm>
           <a:prstGeom prst="rect">
             <a:avLst/>
@@ -9219,7 +8887,7 @@
               <a:buNone/>
             </a:pPr>
             <a:r>
-              <a:rPr lang="en-US" sz="1050" b="1" dirty="0" i="0">
+              <a:rPr lang="en-US" sz="1150" b="1" dirty="0" i="0">
                 <a:solidFill>
                   <a:srgbClr val="F28C28"/>
                 </a:solidFill>
@@ -9239,7 +8907,7 @@
               <a:buNone/>
             </a:pPr>
             <a:r>
-              <a:rPr lang="en-US" sz="1050" b="1" dirty="0" i="0">
+              <a:rPr lang="en-US" sz="1150" b="1" dirty="0" i="0">
                 <a:solidFill>
                   <a:srgbClr val="F28C28"/>
                 </a:solidFill>
@@ -9250,7 +8918,7 @@
               <a:t>Live demo: </a:t>
             </a:r>
             <a:r>
-              <a:rPr lang="en-US" sz="1050" b="1" dirty="0" i="0">
+              <a:rPr lang="en-US" sz="1150" b="1" dirty="0" i="0">
                 <a:solidFill>
                   <a:srgbClr val="F28C28"/>
                 </a:solidFill>
@@ -9327,7 +8995,7 @@
           <a:p>
             <a:pPr algn="ctr"/>
             <a:r>
-              <a:rPr sz="800" b="1">
+              <a:rPr sz="900" b="1">
                 <a:solidFill>
                   <a:srgbClr val="FFFFFF"/>
                 </a:solidFill>
@@ -9362,7 +9030,7 @@
           <a:p>
             <a:pPr algn="ctr"/>
             <a:r>
-              <a:rPr sz="800" b="1">
+              <a:rPr sz="900" b="1">
                 <a:solidFill>
                   <a:srgbClr val="FFFFFF"/>
                 </a:solidFill>
@@ -9397,7 +9065,7 @@
           <a:p>
             <a:pPr algn="ctr"/>
             <a:r>
-              <a:rPr sz="800" b="1">
+              <a:rPr sz="900" b="1">
                 <a:solidFill>
                   <a:srgbClr val="FFFFFF"/>
                 </a:solidFill>
